--- a/docs/presentation.pptx
+++ b/docs/presentation.pptx
@@ -3266,8 +3266,8 @@
         </p:blipFill>
         <p:spPr>
           <a:xfrm>
-            <a:off x="836676" y="1005840"/>
-            <a:ext cx="10515600" cy="5120640"/>
+            <a:off x="1461516" y="1005840"/>
+            <a:ext cx="9265920" cy="5212080"/>
           </a:xfrm>
           <a:prstGeom prst="rect">
             <a:avLst/>
@@ -3392,7 +3392,7 @@
                   <a:srgbClr val="262730"/>
                 </a:solidFill>
               </a:rPr>
-              <a:t>• H1 — Belt → higher yield: REJECTED (margin avg is higher)</a:t>
+              <a:t>• H1 — Belt → higher yield: REJECTED. Latitude sets WHERE coffee grows; agronomy sets HOW MUCH per hectare.</a:t>
             </a:r>
           </a:p>
           <a:p>
@@ -3670,7 +3670,7 @@
                   <a:srgbClr val="8A8A8A"/>
                 </a:solidFill>
               </a:rPr>
-              <a:t>Live dashboard:  streamlit run streamlit_app.py    ·    Repo: github.com/&lt;you&gt;/coffee-bean</a:t>
+              <a:t>Live dashboard:  streamlit run streamlit_app.py    ·    Repo: github.com/jsluo413/coffee-bean</a:t>
             </a:r>
           </a:p>
         </p:txBody>
@@ -3974,7 +3974,7 @@
                   <a:srgbClr val="6F4E37"/>
                 </a:solidFill>
               </a:rPr>
-              <a:t>H1 · Production is wildly concentrated — but the belt isn't more productive</a:t>
+              <a:t>H1 · Where coffee comes from: production hugs the equatorial belt</a:t>
             </a:r>
           </a:p>
         </p:txBody>
@@ -3995,8 +3995,8 @@
         </p:blipFill>
         <p:spPr>
           <a:xfrm>
-            <a:off x="836676" y="1005840"/>
-            <a:ext cx="10515600" cy="5120640"/>
+            <a:off x="1461516" y="1005840"/>
+            <a:ext cx="9265920" cy="5212080"/>
           </a:xfrm>
           <a:prstGeom prst="rect">
             <a:avLst/>
@@ -4032,7 +4032,7 @@
                   <a:srgbClr val="8A8A8A"/>
                 </a:solidFill>
               </a:rPr>
-              <a:t>Belt mean = 0.72 t/ha (n=948)  ·  Margin mean = 1.05 t/ha (n=60)  ·  Welch t = -2.48, p = 0.016</a:t>
+              <a:t>Production = total tonnes grown. Brazil, Vietnam, Colombia, Indonesia, Ethiopia dominate volume — every major producer sits inside ±23.5° latitude.</a:t>
             </a:r>
           </a:p>
         </p:txBody>
@@ -4083,7 +4083,7 @@
                   <a:srgbClr val="6F4E37"/>
                 </a:solidFill>
               </a:rPr>
-              <a:t>H1 · Yield varies more within the belt than between belt and margin</a:t>
+              <a:t>H1 · But the belt is NOT more productive per hectare — hypothesis rejected</a:t>
             </a:r>
           </a:p>
         </p:txBody>
@@ -4104,8 +4104,8 @@
         </p:blipFill>
         <p:spPr>
           <a:xfrm>
-            <a:off x="836676" y="1005840"/>
-            <a:ext cx="10515600" cy="5120640"/>
+            <a:off x="1461516" y="1005840"/>
+            <a:ext cx="9265920" cy="5212080"/>
           </a:xfrm>
           <a:prstGeom prst="rect">
             <a:avLst/>
@@ -4141,7 +4141,7 @@
                   <a:srgbClr val="8A8A8A"/>
                 </a:solidFill>
               </a:rPr>
-              <a:t>Hypothesis rejected. Latitude defines where coffee can grow; agronomy defines how much per hectare.</a:t>
+              <a:t>Yield = tonnes per hectare.  Belt mean = 0.72 t/ha (n=948)  ·  Margin mean = 1.05 t/ha (n=60)  ·  Welch t = -2.48, p = 0.016</a:t>
             </a:r>
           </a:p>
         </p:txBody>
@@ -4213,8 +4213,8 @@
         </p:blipFill>
         <p:spPr>
           <a:xfrm>
-            <a:off x="836676" y="1005840"/>
-            <a:ext cx="10515600" cy="5120640"/>
+            <a:off x="1461516" y="1005840"/>
+            <a:ext cx="9265920" cy="5212080"/>
           </a:xfrm>
           <a:prstGeom prst="rect">
             <a:avLst/>
@@ -4322,8 +4322,8 @@
         </p:blipFill>
         <p:spPr>
           <a:xfrm>
-            <a:off x="836676" y="1005840"/>
-            <a:ext cx="10515600" cy="5120640"/>
+            <a:off x="1461516" y="1005840"/>
+            <a:ext cx="9265920" cy="5212080"/>
           </a:xfrm>
           <a:prstGeom prst="rect">
             <a:avLst/>
@@ -4431,8 +4431,8 @@
         </p:blipFill>
         <p:spPr>
           <a:xfrm>
-            <a:off x="836676" y="1005840"/>
-            <a:ext cx="10515600" cy="5120640"/>
+            <a:off x="1461516" y="1005840"/>
+            <a:ext cx="9265920" cy="5212080"/>
           </a:xfrm>
           <a:prstGeom prst="rect">
             <a:avLst/>
@@ -4540,8 +4540,8 @@
         </p:blipFill>
         <p:spPr>
           <a:xfrm>
-            <a:off x="836676" y="1005840"/>
-            <a:ext cx="10515600" cy="5120640"/>
+            <a:off x="1461516" y="1005840"/>
+            <a:ext cx="9265920" cy="5212080"/>
           </a:xfrm>
           <a:prstGeom prst="rect">
             <a:avLst/>
